--- a/110_linux_script_exercise/linux_02_grep_awk_sed_find_정리.pptx
+++ b/110_linux_script_exercise/linux_02_grep_awk_sed_find_정리.pptx
@@ -5,27 +5,27 @@
     <p:sldMasterId id="2147483648" r:id="rId1"/>
   </p:sldMasterIdLst>
   <p:sldIdLst>
-    <p:sldId id="256" r:id="rId7"/>
-    <p:sldId id="257" r:id="rId8"/>
-    <p:sldId id="258" r:id="rId9"/>
-    <p:sldId id="259" r:id="rId10"/>
-    <p:sldId id="260" r:id="rId11"/>
-    <p:sldId id="261" r:id="rId12"/>
-    <p:sldId id="262" r:id="rId13"/>
-    <p:sldId id="263" r:id="rId14"/>
-    <p:sldId id="264" r:id="rId15"/>
-    <p:sldId id="265" r:id="rId16"/>
-    <p:sldId id="266" r:id="rId17"/>
-    <p:sldId id="267" r:id="rId18"/>
-    <p:sldId id="268" r:id="rId19"/>
-    <p:sldId id="269" r:id="rId20"/>
-    <p:sldId id="270" r:id="rId21"/>
-    <p:sldId id="271" r:id="rId22"/>
-    <p:sldId id="272" r:id="rId23"/>
-    <p:sldId id="273" r:id="rId24"/>
-    <p:sldId id="274" r:id="rId25"/>
+    <p:sldId id="256" r:id="rId2"/>
+    <p:sldId id="257" r:id="rId3"/>
+    <p:sldId id="258" r:id="rId4"/>
+    <p:sldId id="259" r:id="rId5"/>
+    <p:sldId id="260" r:id="rId6"/>
+    <p:sldId id="261" r:id="rId7"/>
+    <p:sldId id="262" r:id="rId8"/>
+    <p:sldId id="263" r:id="rId9"/>
+    <p:sldId id="264" r:id="rId10"/>
+    <p:sldId id="265" r:id="rId11"/>
+    <p:sldId id="266" r:id="rId12"/>
+    <p:sldId id="267" r:id="rId13"/>
+    <p:sldId id="268" r:id="rId14"/>
+    <p:sldId id="269" r:id="rId15"/>
+    <p:sldId id="270" r:id="rId16"/>
+    <p:sldId id="271" r:id="rId17"/>
+    <p:sldId id="272" r:id="rId18"/>
+    <p:sldId id="273" r:id="rId19"/>
+    <p:sldId id="274" r:id="rId20"/>
   </p:sldIdLst>
-  <p:sldSz cx="12191695" cy="6858000" type="screen4x3"/>
+  <p:sldSz cx="12192000" cy="6858000"/>
   <p:notesSz cx="6858000" cy="9144000"/>
   <p:defaultTextStyle>
     <a:defPPr>
@@ -122,6 +122,22 @@
       </a:defRPr>
     </a:lvl9pPr>
   </p:defaultTextStyle>
+  <p:extLst>
+    <p:ext uri="{EFAFB233-063F-42B5-8137-9DF3F51BA10A}">
+      <p15:sldGuideLst xmlns:p15="http://schemas.microsoft.com/office/powerpoint/2012/main">
+        <p15:guide id="1" orient="horz" pos="2160">
+          <p15:clr>
+            <a:srgbClr val="A4A3A4"/>
+          </p15:clr>
+        </p15:guide>
+        <p15:guide id="2" pos="2880">
+          <p15:clr>
+            <a:srgbClr val="A4A3A4"/>
+          </p15:clr>
+        </p15:guide>
+      </p15:sldGuideLst>
+    </p:ext>
+  </p:extLst>
 </p:presentation>
 </file>
 
@@ -154,7 +170,7 @@
         </p:nvSpPr>
         <p:spPr>
           <a:xfrm>
-            <a:off x="685800" y="2130425"/>
+            <a:off x="2209800" y="997816"/>
             <a:ext cx="7772400" cy="1470025"/>
           </a:xfrm>
         </p:spPr>
@@ -163,10 +179,9 @@
           <a:lstStyle/>
           <a:p>
             <a:r>
-              <a:rPr lang="en-US" smtClean="0"/>
+              <a:rPr lang="en-US"/>
               <a:t>Click to edit Master title style</a:t>
             </a:r>
-            <a:endParaRPr lang="en-US"/>
           </a:p>
         </p:txBody>
       </p:sp>
@@ -182,7 +197,7 @@
         </p:nvSpPr>
         <p:spPr>
           <a:xfrm>
-            <a:off x="1371600" y="3886200"/>
+            <a:off x="2895600" y="3200400"/>
             <a:ext cx="6400800" cy="1752600"/>
           </a:xfrm>
         </p:spPr>
@@ -282,10 +297,9 @@
           </a:lstStyle>
           <a:p>
             <a:r>
-              <a:rPr lang="en-US" smtClean="0"/>
+              <a:rPr lang="en-US"/>
               <a:t>Click to edit Master subtitle style</a:t>
             </a:r>
-            <a:endParaRPr lang="en-US"/>
           </a:p>
         </p:txBody>
       </p:sp>
@@ -306,7 +320,7 @@
           <a:p>
             <a:fld id="{5BCAD085-E8A6-8845-BD4E-CB4CCA059FC4}" type="datetimeFigureOut">
               <a:rPr lang="en-US" smtClean="0"/>
-              <a:t>1/27/13</a:t>
+              <a:t>9/29/2026</a:t>
             </a:fld>
             <a:endParaRPr lang="en-US"/>
           </a:p>
@@ -400,10 +414,9 @@
           <a:lstStyle/>
           <a:p>
             <a:r>
-              <a:rPr lang="en-US" smtClean="0"/>
+              <a:rPr lang="en-US"/>
               <a:t>Click to edit Master title style</a:t>
             </a:r>
-            <a:endParaRPr lang="en-US"/>
           </a:p>
         </p:txBody>
       </p:sp>
@@ -424,38 +437,37 @@
           <a:p>
             <a:pPr lvl="0"/>
             <a:r>
-              <a:rPr lang="en-US" smtClean="0"/>
+              <a:rPr lang="en-US"/>
               <a:t>Click to edit Master text styles</a:t>
             </a:r>
           </a:p>
           <a:p>
             <a:pPr lvl="1"/>
             <a:r>
-              <a:rPr lang="en-US" smtClean="0"/>
+              <a:rPr lang="en-US"/>
               <a:t>Second level</a:t>
             </a:r>
           </a:p>
           <a:p>
             <a:pPr lvl="2"/>
             <a:r>
-              <a:rPr lang="en-US" smtClean="0"/>
+              <a:rPr lang="en-US"/>
               <a:t>Third level</a:t>
             </a:r>
           </a:p>
           <a:p>
             <a:pPr lvl="3"/>
             <a:r>
-              <a:rPr lang="en-US" smtClean="0"/>
+              <a:rPr lang="en-US"/>
               <a:t>Fourth level</a:t>
             </a:r>
           </a:p>
           <a:p>
             <a:pPr lvl="4"/>
             <a:r>
-              <a:rPr lang="en-US" smtClean="0"/>
+              <a:rPr lang="en-US"/>
               <a:t>Fifth level</a:t>
             </a:r>
-            <a:endParaRPr lang="en-US"/>
           </a:p>
         </p:txBody>
       </p:sp>
@@ -476,7 +488,7 @@
           <a:p>
             <a:fld id="{5BCAD085-E8A6-8845-BD4E-CB4CCA059FC4}" type="datetimeFigureOut">
               <a:rPr lang="en-US" smtClean="0"/>
-              <a:t>1/27/13</a:t>
+              <a:t>9/29/2026</a:t>
             </a:fld>
             <a:endParaRPr lang="en-US"/>
           </a:p>
@@ -575,10 +587,9 @@
           <a:lstStyle/>
           <a:p>
             <a:r>
-              <a:rPr lang="en-US" smtClean="0"/>
+              <a:rPr lang="en-US"/>
               <a:t>Click to edit Master title style</a:t>
             </a:r>
-            <a:endParaRPr lang="en-US"/>
           </a:p>
         </p:txBody>
       </p:sp>
@@ -604,38 +615,37 @@
           <a:p>
             <a:pPr lvl="0"/>
             <a:r>
-              <a:rPr lang="en-US" smtClean="0"/>
+              <a:rPr lang="en-US"/>
               <a:t>Click to edit Master text styles</a:t>
             </a:r>
           </a:p>
           <a:p>
             <a:pPr lvl="1"/>
             <a:r>
-              <a:rPr lang="en-US" smtClean="0"/>
+              <a:rPr lang="en-US"/>
               <a:t>Second level</a:t>
             </a:r>
           </a:p>
           <a:p>
             <a:pPr lvl="2"/>
             <a:r>
-              <a:rPr lang="en-US" smtClean="0"/>
+              <a:rPr lang="en-US"/>
               <a:t>Third level</a:t>
             </a:r>
           </a:p>
           <a:p>
             <a:pPr lvl="3"/>
             <a:r>
-              <a:rPr lang="en-US" smtClean="0"/>
+              <a:rPr lang="en-US"/>
               <a:t>Fourth level</a:t>
             </a:r>
           </a:p>
           <a:p>
             <a:pPr lvl="4"/>
             <a:r>
-              <a:rPr lang="en-US" smtClean="0"/>
+              <a:rPr lang="en-US"/>
               <a:t>Fifth level</a:t>
             </a:r>
-            <a:endParaRPr lang="en-US"/>
           </a:p>
         </p:txBody>
       </p:sp>
@@ -656,7 +666,7 @@
           <a:p>
             <a:fld id="{5BCAD085-E8A6-8845-BD4E-CB4CCA059FC4}" type="datetimeFigureOut">
               <a:rPr lang="en-US" smtClean="0"/>
-              <a:t>1/27/13</a:t>
+              <a:t>9/29/2026</a:t>
             </a:fld>
             <a:endParaRPr lang="en-US"/>
           </a:p>
@@ -750,10 +760,9 @@
           <a:lstStyle/>
           <a:p>
             <a:r>
-              <a:rPr lang="en-US" smtClean="0"/>
+              <a:rPr lang="en-US"/>
               <a:t>Click to edit Master title style</a:t>
             </a:r>
-            <a:endParaRPr lang="en-US"/>
           </a:p>
         </p:txBody>
       </p:sp>
@@ -774,38 +783,37 @@
           <a:p>
             <a:pPr lvl="0"/>
             <a:r>
-              <a:rPr lang="en-US" smtClean="0"/>
+              <a:rPr lang="en-US"/>
               <a:t>Click to edit Master text styles</a:t>
             </a:r>
           </a:p>
           <a:p>
             <a:pPr lvl="1"/>
             <a:r>
-              <a:rPr lang="en-US" smtClean="0"/>
+              <a:rPr lang="en-US"/>
               <a:t>Second level</a:t>
             </a:r>
           </a:p>
           <a:p>
             <a:pPr lvl="2"/>
             <a:r>
-              <a:rPr lang="en-US" smtClean="0"/>
+              <a:rPr lang="en-US"/>
               <a:t>Third level</a:t>
             </a:r>
           </a:p>
           <a:p>
             <a:pPr lvl="3"/>
             <a:r>
-              <a:rPr lang="en-US" smtClean="0"/>
+              <a:rPr lang="en-US"/>
               <a:t>Fourth level</a:t>
             </a:r>
           </a:p>
           <a:p>
             <a:pPr lvl="4"/>
             <a:r>
-              <a:rPr lang="en-US" smtClean="0"/>
+              <a:rPr lang="en-US"/>
               <a:t>Fifth level</a:t>
             </a:r>
-            <a:endParaRPr lang="en-US"/>
           </a:p>
         </p:txBody>
       </p:sp>
@@ -826,7 +834,7 @@
           <a:p>
             <a:fld id="{5BCAD085-E8A6-8845-BD4E-CB4CCA059FC4}" type="datetimeFigureOut">
               <a:rPr lang="en-US" smtClean="0"/>
-              <a:t>1/27/13</a:t>
+              <a:t>9/29/2026</a:t>
             </a:fld>
             <a:endParaRPr lang="en-US"/>
           </a:p>
@@ -929,10 +937,9 @@
           </a:lstStyle>
           <a:p>
             <a:r>
-              <a:rPr lang="en-US" smtClean="0"/>
+              <a:rPr lang="en-US"/>
               <a:t>Click to edit Master title style</a:t>
             </a:r>
-            <a:endParaRPr lang="en-US"/>
           </a:p>
         </p:txBody>
       </p:sp>
@@ -1049,7 +1056,7 @@
           <a:p>
             <a:pPr lvl="0"/>
             <a:r>
-              <a:rPr lang="en-US" smtClean="0"/>
+              <a:rPr lang="en-US"/>
               <a:t>Click to edit Master text styles</a:t>
             </a:r>
           </a:p>
@@ -1072,7 +1079,7 @@
           <a:p>
             <a:fld id="{5BCAD085-E8A6-8845-BD4E-CB4CCA059FC4}" type="datetimeFigureOut">
               <a:rPr lang="en-US" smtClean="0"/>
-              <a:t>1/27/13</a:t>
+              <a:t>9/29/2026</a:t>
             </a:fld>
             <a:endParaRPr lang="en-US"/>
           </a:p>
@@ -1166,10 +1173,9 @@
           <a:lstStyle/>
           <a:p>
             <a:r>
-              <a:rPr lang="en-US" smtClean="0"/>
+              <a:rPr lang="en-US"/>
               <a:t>Click to edit Master title style</a:t>
             </a:r>
-            <a:endParaRPr lang="en-US"/>
           </a:p>
         </p:txBody>
       </p:sp>
@@ -1223,38 +1229,37 @@
           <a:p>
             <a:pPr lvl="0"/>
             <a:r>
-              <a:rPr lang="en-US" smtClean="0"/>
+              <a:rPr lang="en-US"/>
               <a:t>Click to edit Master text styles</a:t>
             </a:r>
           </a:p>
           <a:p>
             <a:pPr lvl="1"/>
             <a:r>
-              <a:rPr lang="en-US" smtClean="0"/>
+              <a:rPr lang="en-US"/>
               <a:t>Second level</a:t>
             </a:r>
           </a:p>
           <a:p>
             <a:pPr lvl="2"/>
             <a:r>
-              <a:rPr lang="en-US" smtClean="0"/>
+              <a:rPr lang="en-US"/>
               <a:t>Third level</a:t>
             </a:r>
           </a:p>
           <a:p>
             <a:pPr lvl="3"/>
             <a:r>
-              <a:rPr lang="en-US" smtClean="0"/>
+              <a:rPr lang="en-US"/>
               <a:t>Fourth level</a:t>
             </a:r>
           </a:p>
           <a:p>
             <a:pPr lvl="4"/>
             <a:r>
-              <a:rPr lang="en-US" smtClean="0"/>
+              <a:rPr lang="en-US"/>
               <a:t>Fifth level</a:t>
             </a:r>
-            <a:endParaRPr lang="en-US"/>
           </a:p>
         </p:txBody>
       </p:sp>
@@ -1308,38 +1313,37 @@
           <a:p>
             <a:pPr lvl="0"/>
             <a:r>
-              <a:rPr lang="en-US" smtClean="0"/>
+              <a:rPr lang="en-US"/>
               <a:t>Click to edit Master text styles</a:t>
             </a:r>
           </a:p>
           <a:p>
             <a:pPr lvl="1"/>
             <a:r>
-              <a:rPr lang="en-US" smtClean="0"/>
+              <a:rPr lang="en-US"/>
               <a:t>Second level</a:t>
             </a:r>
           </a:p>
           <a:p>
             <a:pPr lvl="2"/>
             <a:r>
-              <a:rPr lang="en-US" smtClean="0"/>
+              <a:rPr lang="en-US"/>
               <a:t>Third level</a:t>
             </a:r>
           </a:p>
           <a:p>
             <a:pPr lvl="3"/>
             <a:r>
-              <a:rPr lang="en-US" smtClean="0"/>
+              <a:rPr lang="en-US"/>
               <a:t>Fourth level</a:t>
             </a:r>
           </a:p>
           <a:p>
             <a:pPr lvl="4"/>
             <a:r>
-              <a:rPr lang="en-US" smtClean="0"/>
+              <a:rPr lang="en-US"/>
               <a:t>Fifth level</a:t>
             </a:r>
-            <a:endParaRPr lang="en-US"/>
           </a:p>
         </p:txBody>
       </p:sp>
@@ -1360,7 +1364,7 @@
           <a:p>
             <a:fld id="{5BCAD085-E8A6-8845-BD4E-CB4CCA059FC4}" type="datetimeFigureOut">
               <a:rPr lang="en-US" smtClean="0"/>
-              <a:t>1/27/13</a:t>
+              <a:t>9/29/2026</a:t>
             </a:fld>
             <a:endParaRPr lang="en-US"/>
           </a:p>
@@ -1458,10 +1462,9 @@
           </a:lstStyle>
           <a:p>
             <a:r>
-              <a:rPr lang="en-US" smtClean="0"/>
+              <a:rPr lang="en-US"/>
               <a:t>Click to edit Master title style</a:t>
             </a:r>
-            <a:endParaRPr lang="en-US"/>
           </a:p>
         </p:txBody>
       </p:sp>
@@ -1524,7 +1527,7 @@
           <a:p>
             <a:pPr lvl="0"/>
             <a:r>
-              <a:rPr lang="en-US" smtClean="0"/>
+              <a:rPr lang="en-US"/>
               <a:t>Click to edit Master text styles</a:t>
             </a:r>
           </a:p>
@@ -1580,38 +1583,37 @@
           <a:p>
             <a:pPr lvl="0"/>
             <a:r>
-              <a:rPr lang="en-US" smtClean="0"/>
+              <a:rPr lang="en-US"/>
               <a:t>Click to edit Master text styles</a:t>
             </a:r>
           </a:p>
           <a:p>
             <a:pPr lvl="1"/>
             <a:r>
-              <a:rPr lang="en-US" smtClean="0"/>
+              <a:rPr lang="en-US"/>
               <a:t>Second level</a:t>
             </a:r>
           </a:p>
           <a:p>
             <a:pPr lvl="2"/>
             <a:r>
-              <a:rPr lang="en-US" smtClean="0"/>
+              <a:rPr lang="en-US"/>
               <a:t>Third level</a:t>
             </a:r>
           </a:p>
           <a:p>
             <a:pPr lvl="3"/>
             <a:r>
-              <a:rPr lang="en-US" smtClean="0"/>
+              <a:rPr lang="en-US"/>
               <a:t>Fourth level</a:t>
             </a:r>
           </a:p>
           <a:p>
             <a:pPr lvl="4"/>
             <a:r>
-              <a:rPr lang="en-US" smtClean="0"/>
+              <a:rPr lang="en-US"/>
               <a:t>Fifth level</a:t>
             </a:r>
-            <a:endParaRPr lang="en-US"/>
           </a:p>
         </p:txBody>
       </p:sp>
@@ -1674,7 +1676,7 @@
           <a:p>
             <a:pPr lvl="0"/>
             <a:r>
-              <a:rPr lang="en-US" smtClean="0"/>
+              <a:rPr lang="en-US"/>
               <a:t>Click to edit Master text styles</a:t>
             </a:r>
           </a:p>
@@ -1730,38 +1732,37 @@
           <a:p>
             <a:pPr lvl="0"/>
             <a:r>
-              <a:rPr lang="en-US" smtClean="0"/>
+              <a:rPr lang="en-US"/>
               <a:t>Click to edit Master text styles</a:t>
             </a:r>
           </a:p>
           <a:p>
             <a:pPr lvl="1"/>
             <a:r>
-              <a:rPr lang="en-US" smtClean="0"/>
+              <a:rPr lang="en-US"/>
               <a:t>Second level</a:t>
             </a:r>
           </a:p>
           <a:p>
             <a:pPr lvl="2"/>
             <a:r>
-              <a:rPr lang="en-US" smtClean="0"/>
+              <a:rPr lang="en-US"/>
               <a:t>Third level</a:t>
             </a:r>
           </a:p>
           <a:p>
             <a:pPr lvl="3"/>
             <a:r>
-              <a:rPr lang="en-US" smtClean="0"/>
+              <a:rPr lang="en-US"/>
               <a:t>Fourth level</a:t>
             </a:r>
           </a:p>
           <a:p>
             <a:pPr lvl="4"/>
             <a:r>
-              <a:rPr lang="en-US" smtClean="0"/>
+              <a:rPr lang="en-US"/>
               <a:t>Fifth level</a:t>
             </a:r>
-            <a:endParaRPr lang="en-US"/>
           </a:p>
         </p:txBody>
       </p:sp>
@@ -1782,7 +1783,7 @@
           <a:p>
             <a:fld id="{5BCAD085-E8A6-8845-BD4E-CB4CCA059FC4}" type="datetimeFigureOut">
               <a:rPr lang="en-US" smtClean="0"/>
-              <a:t>1/27/13</a:t>
+              <a:t>9/29/2026</a:t>
             </a:fld>
             <a:endParaRPr lang="en-US"/>
           </a:p>
@@ -1876,10 +1877,9 @@
           <a:lstStyle/>
           <a:p>
             <a:r>
-              <a:rPr lang="en-US" smtClean="0"/>
+              <a:rPr lang="en-US"/>
               <a:t>Click to edit Master title style</a:t>
             </a:r>
-            <a:endParaRPr lang="en-US"/>
           </a:p>
         </p:txBody>
       </p:sp>
@@ -1900,7 +1900,7 @@
           <a:p>
             <a:fld id="{5BCAD085-E8A6-8845-BD4E-CB4CCA059FC4}" type="datetimeFigureOut">
               <a:rPr lang="en-US" smtClean="0"/>
-              <a:t>1/27/13</a:t>
+              <a:t>9/29/2026</a:t>
             </a:fld>
             <a:endParaRPr lang="en-US"/>
           </a:p>
@@ -1995,7 +1995,7 @@
           <a:p>
             <a:fld id="{5BCAD085-E8A6-8845-BD4E-CB4CCA059FC4}" type="datetimeFigureOut">
               <a:rPr lang="en-US" smtClean="0"/>
-              <a:t>1/27/13</a:t>
+              <a:t>9/29/2026</a:t>
             </a:fld>
             <a:endParaRPr lang="en-US"/>
           </a:p>
@@ -2098,10 +2098,9 @@
           </a:lstStyle>
           <a:p>
             <a:r>
-              <a:rPr lang="en-US" smtClean="0"/>
+              <a:rPr lang="en-US"/>
               <a:t>Click to edit Master title style</a:t>
             </a:r>
-            <a:endParaRPr lang="en-US"/>
           </a:p>
         </p:txBody>
       </p:sp>
@@ -2155,38 +2154,37 @@
           <a:p>
             <a:pPr lvl="0"/>
             <a:r>
-              <a:rPr lang="en-US" smtClean="0"/>
+              <a:rPr lang="en-US"/>
               <a:t>Click to edit Master text styles</a:t>
             </a:r>
           </a:p>
           <a:p>
             <a:pPr lvl="1"/>
             <a:r>
-              <a:rPr lang="en-US" smtClean="0"/>
+              <a:rPr lang="en-US"/>
               <a:t>Second level</a:t>
             </a:r>
           </a:p>
           <a:p>
             <a:pPr lvl="2"/>
             <a:r>
-              <a:rPr lang="en-US" smtClean="0"/>
+              <a:rPr lang="en-US"/>
               <a:t>Third level</a:t>
             </a:r>
           </a:p>
           <a:p>
             <a:pPr lvl="3"/>
             <a:r>
-              <a:rPr lang="en-US" smtClean="0"/>
+              <a:rPr lang="en-US"/>
               <a:t>Fourth level</a:t>
             </a:r>
           </a:p>
           <a:p>
             <a:pPr lvl="4"/>
             <a:r>
-              <a:rPr lang="en-US" smtClean="0"/>
+              <a:rPr lang="en-US"/>
               <a:t>Fifth level</a:t>
             </a:r>
-            <a:endParaRPr lang="en-US"/>
           </a:p>
         </p:txBody>
       </p:sp>
@@ -2249,7 +2247,7 @@
           <a:p>
             <a:pPr lvl="0"/>
             <a:r>
-              <a:rPr lang="en-US" smtClean="0"/>
+              <a:rPr lang="en-US"/>
               <a:t>Click to edit Master text styles</a:t>
             </a:r>
           </a:p>
@@ -2272,7 +2270,7 @@
           <a:p>
             <a:fld id="{5BCAD085-E8A6-8845-BD4E-CB4CCA059FC4}" type="datetimeFigureOut">
               <a:rPr lang="en-US" smtClean="0"/>
-              <a:t>1/27/13</a:t>
+              <a:t>9/29/2026</a:t>
             </a:fld>
             <a:endParaRPr lang="en-US"/>
           </a:p>
@@ -2375,10 +2373,9 @@
           </a:lstStyle>
           <a:p>
             <a:r>
-              <a:rPr lang="en-US" smtClean="0"/>
+              <a:rPr lang="en-US"/>
               <a:t>Click to edit Master title style</a:t>
             </a:r>
-            <a:endParaRPr lang="en-US"/>
           </a:p>
         </p:txBody>
       </p:sp>
@@ -2502,7 +2499,7 @@
           <a:p>
             <a:pPr lvl="0"/>
             <a:r>
-              <a:rPr lang="en-US" smtClean="0"/>
+              <a:rPr lang="en-US"/>
               <a:t>Click to edit Master text styles</a:t>
             </a:r>
           </a:p>
@@ -2525,7 +2522,7 @@
           <a:p>
             <a:fld id="{5BCAD085-E8A6-8845-BD4E-CB4CCA059FC4}" type="datetimeFigureOut">
               <a:rPr lang="en-US" smtClean="0"/>
-              <a:t>1/27/13</a:t>
+              <a:t>9/29/2026</a:t>
             </a:fld>
             <a:endParaRPr lang="en-US"/>
           </a:p>
@@ -2620,8 +2617,8 @@
         </p:nvSpPr>
         <p:spPr>
           <a:xfrm>
-            <a:off x="457200" y="274638"/>
-            <a:ext cx="8229600" cy="1143000"/>
+            <a:off x="457199" y="274638"/>
+            <a:ext cx="11191009" cy="1143000"/>
           </a:xfrm>
           <a:prstGeom prst="rect">
             <a:avLst/>
@@ -2634,10 +2631,9 @@
           <a:lstStyle/>
           <a:p>
             <a:r>
-              <a:rPr lang="en-US" smtClean="0"/>
+              <a:rPr lang="en-US"/>
               <a:t>Click to edit Master title style</a:t>
             </a:r>
-            <a:endParaRPr lang="en-US"/>
           </a:p>
         </p:txBody>
       </p:sp>
@@ -2654,7 +2650,7 @@
         <p:spPr>
           <a:xfrm>
             <a:off x="457200" y="1600200"/>
-            <a:ext cx="8229600" cy="4525963"/>
+            <a:ext cx="11191008" cy="4525963"/>
           </a:xfrm>
           <a:prstGeom prst="rect">
             <a:avLst/>
@@ -2668,38 +2664,37 @@
           <a:p>
             <a:pPr lvl="0"/>
             <a:r>
-              <a:rPr lang="en-US" smtClean="0"/>
+              <a:rPr lang="en-US"/>
               <a:t>Click to edit Master text styles</a:t>
             </a:r>
           </a:p>
           <a:p>
             <a:pPr lvl="1"/>
             <a:r>
-              <a:rPr lang="en-US" smtClean="0"/>
+              <a:rPr lang="en-US"/>
               <a:t>Second level</a:t>
             </a:r>
           </a:p>
           <a:p>
             <a:pPr lvl="2"/>
             <a:r>
-              <a:rPr lang="en-US" smtClean="0"/>
+              <a:rPr lang="en-US"/>
               <a:t>Third level</a:t>
             </a:r>
           </a:p>
           <a:p>
             <a:pPr lvl="3"/>
             <a:r>
-              <a:rPr lang="en-US" smtClean="0"/>
+              <a:rPr lang="en-US"/>
               <a:t>Fourth level</a:t>
             </a:r>
           </a:p>
           <a:p>
             <a:pPr lvl="4"/>
             <a:r>
-              <a:rPr lang="en-US" smtClean="0"/>
+              <a:rPr lang="en-US"/>
               <a:t>Fifth level</a:t>
             </a:r>
-            <a:endParaRPr lang="en-US"/>
           </a:p>
         </p:txBody>
       </p:sp>
@@ -2738,7 +2733,7 @@
           <a:p>
             <a:fld id="{5BCAD085-E8A6-8845-BD4E-CB4CCA059FC4}" type="datetimeFigureOut">
               <a:rPr lang="en-US" smtClean="0"/>
-              <a:t>1/27/13</a:t>
+              <a:t>9/29/2026</a:t>
             </a:fld>
             <a:endParaRPr lang="en-US"/>
           </a:p>
@@ -2756,7 +2751,7 @@
         </p:nvSpPr>
         <p:spPr>
           <a:xfrm>
-            <a:off x="3124200" y="6356350"/>
+            <a:off x="4648200" y="6356350"/>
             <a:ext cx="2895600" cy="365125"/>
           </a:xfrm>
           <a:prstGeom prst="rect">
@@ -2793,7 +2788,7 @@
         </p:nvSpPr>
         <p:spPr>
           <a:xfrm>
-            <a:off x="6553200" y="6356350"/>
+            <a:off x="9514608" y="6356350"/>
             <a:ext cx="2133600" cy="365125"/>
           </a:xfrm>
           <a:prstGeom prst="rect">
@@ -3097,7 +3092,7 @@
 </file>
 
 <file path=ppt/slides/slide1.xml><?xml version="1.0" encoding="utf-8"?>
-<p:sld xmlns:a="http://schemas.openxmlformats.org/drawingml/2006/main" xmlns:p="http://schemas.openxmlformats.org/presentationml/2006/main" xmlns:r="http://schemas.openxmlformats.org/officeDocument/2006/relationships">
+<p:sld xmlns:a="http://schemas.openxmlformats.org/drawingml/2006/main" xmlns:r="http://schemas.openxmlformats.org/officeDocument/2006/relationships" xmlns:p="http://schemas.openxmlformats.org/presentationml/2006/main">
   <p:cSld>
     <p:spTree>
       <p:nvGrpSpPr>
@@ -3105,7 +3100,14 @@
         <p:cNvGrpSpPr/>
         <p:nvPr/>
       </p:nvGrpSpPr>
-      <p:grpSpPr/>
+      <p:grpSpPr>
+        <a:xfrm>
+          <a:off x="0" y="0"/>
+          <a:ext cx="0" cy="0"/>
+          <a:chOff x="0" y="0"/>
+          <a:chExt cx="0" cy="0"/>
+        </a:xfrm>
+      </p:grpSpPr>
       <p:sp>
         <p:nvSpPr>
           <p:cNvPr id="2" name="Title 1"/>
@@ -3157,7 +3159,7 @@
 </file>
 
 <file path=ppt/slides/slide10.xml><?xml version="1.0" encoding="utf-8"?>
-<p:sld xmlns:a="http://schemas.openxmlformats.org/drawingml/2006/main" xmlns:p="http://schemas.openxmlformats.org/presentationml/2006/main" xmlns:r="http://schemas.openxmlformats.org/officeDocument/2006/relationships">
+<p:sld xmlns:a="http://schemas.openxmlformats.org/drawingml/2006/main" xmlns:r="http://schemas.openxmlformats.org/officeDocument/2006/relationships" xmlns:p="http://schemas.openxmlformats.org/presentationml/2006/main">
   <p:cSld>
     <p:spTree>
       <p:nvGrpSpPr>
@@ -3165,7 +3167,14 @@
         <p:cNvGrpSpPr/>
         <p:nvPr/>
       </p:nvGrpSpPr>
-      <p:grpSpPr/>
+      <p:grpSpPr>
+        <a:xfrm>
+          <a:off x="0" y="0"/>
+          <a:ext cx="0" cy="0"/>
+          <a:chOff x="0" y="0"/>
+          <a:chExt cx="0" cy="0"/>
+        </a:xfrm>
+      </p:grpSpPr>
       <p:sp>
         <p:nvSpPr>
           <p:cNvPr id="2" name="Title 1"/>
@@ -3260,7 +3269,7 @@
 </file>
 
 <file path=ppt/slides/slide11.xml><?xml version="1.0" encoding="utf-8"?>
-<p:sld xmlns:a="http://schemas.openxmlformats.org/drawingml/2006/main" xmlns:p="http://schemas.openxmlformats.org/presentationml/2006/main" xmlns:r="http://schemas.openxmlformats.org/officeDocument/2006/relationships">
+<p:sld xmlns:a="http://schemas.openxmlformats.org/drawingml/2006/main" xmlns:r="http://schemas.openxmlformats.org/officeDocument/2006/relationships" xmlns:p="http://schemas.openxmlformats.org/presentationml/2006/main">
   <p:cSld>
     <p:spTree>
       <p:nvGrpSpPr>
@@ -3268,7 +3277,14 @@
         <p:cNvGrpSpPr/>
         <p:nvPr/>
       </p:nvGrpSpPr>
-      <p:grpSpPr/>
+      <p:grpSpPr>
+        <a:xfrm>
+          <a:off x="0" y="0"/>
+          <a:ext cx="0" cy="0"/>
+          <a:chOff x="0" y="0"/>
+          <a:chExt cx="0" cy="0"/>
+        </a:xfrm>
+      </p:grpSpPr>
       <p:sp>
         <p:nvSpPr>
           <p:cNvPr id="2" name="Title 1"/>
@@ -3358,6 +3374,7 @@
                 <a:latin typeface="Consolas"/>
               </a:defRPr>
             </a:pPr>
+            <a:endParaRPr/>
           </a:p>
           <a:p>
             <a:pPr>
@@ -3390,7 +3407,7 @@
 </file>
 
 <file path=ppt/slides/slide12.xml><?xml version="1.0" encoding="utf-8"?>
-<p:sld xmlns:a="http://schemas.openxmlformats.org/drawingml/2006/main" xmlns:p="http://schemas.openxmlformats.org/presentationml/2006/main" xmlns:r="http://schemas.openxmlformats.org/officeDocument/2006/relationships">
+<p:sld xmlns:a="http://schemas.openxmlformats.org/drawingml/2006/main" xmlns:r="http://schemas.openxmlformats.org/officeDocument/2006/relationships" xmlns:p="http://schemas.openxmlformats.org/presentationml/2006/main">
   <p:cSld>
     <p:spTree>
       <p:nvGrpSpPr>
@@ -3398,7 +3415,14 @@
         <p:cNvGrpSpPr/>
         <p:nvPr/>
       </p:nvGrpSpPr>
-      <p:grpSpPr/>
+      <p:grpSpPr>
+        <a:xfrm>
+          <a:off x="0" y="0"/>
+          <a:ext cx="0" cy="0"/>
+          <a:chOff x="0" y="0"/>
+          <a:chExt cx="0" cy="0"/>
+        </a:xfrm>
+      </p:grpSpPr>
       <p:sp>
         <p:nvSpPr>
           <p:cNvPr id="2" name="Title 1"/>
@@ -3488,6 +3512,7 @@
                 <a:latin typeface="Consolas"/>
               </a:defRPr>
             </a:pPr>
+            <a:endParaRPr/>
           </a:p>
           <a:p>
             <a:pPr>
@@ -3520,7 +3545,7 @@
 </file>
 
 <file path=ppt/slides/slide13.xml><?xml version="1.0" encoding="utf-8"?>
-<p:sld xmlns:a="http://schemas.openxmlformats.org/drawingml/2006/main" xmlns:p="http://schemas.openxmlformats.org/presentationml/2006/main" xmlns:r="http://schemas.openxmlformats.org/officeDocument/2006/relationships">
+<p:sld xmlns:a="http://schemas.openxmlformats.org/drawingml/2006/main" xmlns:r="http://schemas.openxmlformats.org/officeDocument/2006/relationships" xmlns:p="http://schemas.openxmlformats.org/presentationml/2006/main">
   <p:cSld>
     <p:spTree>
       <p:nvGrpSpPr>
@@ -3528,7 +3553,14 @@
         <p:cNvGrpSpPr/>
         <p:nvPr/>
       </p:nvGrpSpPr>
-      <p:grpSpPr/>
+      <p:grpSpPr>
+        <a:xfrm>
+          <a:off x="0" y="0"/>
+          <a:ext cx="0" cy="0"/>
+          <a:chOff x="0" y="0"/>
+          <a:chExt cx="0" cy="0"/>
+        </a:xfrm>
+      </p:grpSpPr>
       <p:sp>
         <p:nvSpPr>
           <p:cNvPr id="2" name="Title 1"/>
@@ -3618,6 +3650,7 @@
                 <a:latin typeface="Consolas"/>
               </a:defRPr>
             </a:pPr>
+            <a:endParaRPr/>
           </a:p>
           <a:p>
             <a:pPr>
@@ -3640,7 +3673,7 @@
 </file>
 
 <file path=ppt/slides/slide14.xml><?xml version="1.0" encoding="utf-8"?>
-<p:sld xmlns:a="http://schemas.openxmlformats.org/drawingml/2006/main" xmlns:p="http://schemas.openxmlformats.org/presentationml/2006/main" xmlns:r="http://schemas.openxmlformats.org/officeDocument/2006/relationships">
+<p:sld xmlns:a="http://schemas.openxmlformats.org/drawingml/2006/main" xmlns:r="http://schemas.openxmlformats.org/officeDocument/2006/relationships" xmlns:p="http://schemas.openxmlformats.org/presentationml/2006/main">
   <p:cSld>
     <p:spTree>
       <p:nvGrpSpPr>
@@ -3648,7 +3681,14 @@
         <p:cNvGrpSpPr/>
         <p:nvPr/>
       </p:nvGrpSpPr>
-      <p:grpSpPr/>
+      <p:grpSpPr>
+        <a:xfrm>
+          <a:off x="0" y="0"/>
+          <a:ext cx="0" cy="0"/>
+          <a:chOff x="0" y="0"/>
+          <a:chExt cx="0" cy="0"/>
+        </a:xfrm>
+      </p:grpSpPr>
       <p:sp>
         <p:nvSpPr>
           <p:cNvPr id="2" name="Title 1"/>
@@ -3753,7 +3793,7 @@
 </file>
 
 <file path=ppt/slides/slide15.xml><?xml version="1.0" encoding="utf-8"?>
-<p:sld xmlns:a="http://schemas.openxmlformats.org/drawingml/2006/main" xmlns:p="http://schemas.openxmlformats.org/presentationml/2006/main" xmlns:r="http://schemas.openxmlformats.org/officeDocument/2006/relationships">
+<p:sld xmlns:a="http://schemas.openxmlformats.org/drawingml/2006/main" xmlns:r="http://schemas.openxmlformats.org/officeDocument/2006/relationships" xmlns:p="http://schemas.openxmlformats.org/presentationml/2006/main">
   <p:cSld>
     <p:spTree>
       <p:nvGrpSpPr>
@@ -3761,7 +3801,14 @@
         <p:cNvGrpSpPr/>
         <p:nvPr/>
       </p:nvGrpSpPr>
-      <p:grpSpPr/>
+      <p:grpSpPr>
+        <a:xfrm>
+          <a:off x="0" y="0"/>
+          <a:ext cx="0" cy="0"/>
+          <a:chOff x="0" y="0"/>
+          <a:chExt cx="0" cy="0"/>
+        </a:xfrm>
+      </p:grpSpPr>
       <p:sp>
         <p:nvSpPr>
           <p:cNvPr id="2" name="Title 1"/>
@@ -3876,7 +3923,7 @@
 </file>
 
 <file path=ppt/slides/slide16.xml><?xml version="1.0" encoding="utf-8"?>
-<p:sld xmlns:a="http://schemas.openxmlformats.org/drawingml/2006/main" xmlns:p="http://schemas.openxmlformats.org/presentationml/2006/main" xmlns:r="http://schemas.openxmlformats.org/officeDocument/2006/relationships">
+<p:sld xmlns:a="http://schemas.openxmlformats.org/drawingml/2006/main" xmlns:r="http://schemas.openxmlformats.org/officeDocument/2006/relationships" xmlns:p="http://schemas.openxmlformats.org/presentationml/2006/main">
   <p:cSld>
     <p:spTree>
       <p:nvGrpSpPr>
@@ -3884,7 +3931,14 @@
         <p:cNvGrpSpPr/>
         <p:nvPr/>
       </p:nvGrpSpPr>
-      <p:grpSpPr/>
+      <p:grpSpPr>
+        <a:xfrm>
+          <a:off x="0" y="0"/>
+          <a:ext cx="0" cy="0"/>
+          <a:chOff x="0" y="0"/>
+          <a:chExt cx="0" cy="0"/>
+        </a:xfrm>
+      </p:grpSpPr>
       <p:sp>
         <p:nvSpPr>
           <p:cNvPr id="2" name="Title 1"/>
@@ -3989,7 +4043,7 @@
 </file>
 
 <file path=ppt/slides/slide17.xml><?xml version="1.0" encoding="utf-8"?>
-<p:sld xmlns:a="http://schemas.openxmlformats.org/drawingml/2006/main" xmlns:p="http://schemas.openxmlformats.org/presentationml/2006/main" xmlns:r="http://schemas.openxmlformats.org/officeDocument/2006/relationships">
+<p:sld xmlns:a="http://schemas.openxmlformats.org/drawingml/2006/main" xmlns:r="http://schemas.openxmlformats.org/officeDocument/2006/relationships" xmlns:p="http://schemas.openxmlformats.org/presentationml/2006/main">
   <p:cSld>
     <p:spTree>
       <p:nvGrpSpPr>
@@ -3997,7 +4051,14 @@
         <p:cNvGrpSpPr/>
         <p:nvPr/>
       </p:nvGrpSpPr>
-      <p:grpSpPr/>
+      <p:grpSpPr>
+        <a:xfrm>
+          <a:off x="0" y="0"/>
+          <a:ext cx="0" cy="0"/>
+          <a:chOff x="0" y="0"/>
+          <a:chExt cx="0" cy="0"/>
+        </a:xfrm>
+      </p:grpSpPr>
       <p:sp>
         <p:nvSpPr>
           <p:cNvPr id="2" name="Title 1"/>
@@ -4132,7 +4193,7 @@
 </file>
 
 <file path=ppt/slides/slide18.xml><?xml version="1.0" encoding="utf-8"?>
-<p:sld xmlns:a="http://schemas.openxmlformats.org/drawingml/2006/main" xmlns:p="http://schemas.openxmlformats.org/presentationml/2006/main" xmlns:r="http://schemas.openxmlformats.org/officeDocument/2006/relationships">
+<p:sld xmlns:a="http://schemas.openxmlformats.org/drawingml/2006/main" xmlns:r="http://schemas.openxmlformats.org/officeDocument/2006/relationships" xmlns:p="http://schemas.openxmlformats.org/presentationml/2006/main">
   <p:cSld>
     <p:spTree>
       <p:nvGrpSpPr>
@@ -4140,7 +4201,14 @@
         <p:cNvGrpSpPr/>
         <p:nvPr/>
       </p:nvGrpSpPr>
-      <p:grpSpPr/>
+      <p:grpSpPr>
+        <a:xfrm>
+          <a:off x="0" y="0"/>
+          <a:ext cx="0" cy="0"/>
+          <a:chOff x="0" y="0"/>
+          <a:chExt cx="0" cy="0"/>
+        </a:xfrm>
+      </p:grpSpPr>
       <p:sp>
         <p:nvSpPr>
           <p:cNvPr id="2" name="Title 1"/>
@@ -4212,6 +4280,7 @@
             <a:pPr>
               <a:defRPr sz="2200"/>
             </a:pPr>
+            <a:endParaRPr/>
           </a:p>
           <a:p>
             <a:pPr>
@@ -4248,7 +4317,7 @@
 </file>
 
 <file path=ppt/slides/slide19.xml><?xml version="1.0" encoding="utf-8"?>
-<p:sld xmlns:a="http://schemas.openxmlformats.org/drawingml/2006/main" xmlns:p="http://schemas.openxmlformats.org/presentationml/2006/main" xmlns:r="http://schemas.openxmlformats.org/officeDocument/2006/relationships">
+<p:sld xmlns:a="http://schemas.openxmlformats.org/drawingml/2006/main" xmlns:r="http://schemas.openxmlformats.org/officeDocument/2006/relationships" xmlns:p="http://schemas.openxmlformats.org/presentationml/2006/main">
   <p:cSld>
     <p:spTree>
       <p:nvGrpSpPr>
@@ -4256,7 +4325,14 @@
         <p:cNvGrpSpPr/>
         <p:nvPr/>
       </p:nvGrpSpPr>
-      <p:grpSpPr/>
+      <p:grpSpPr>
+        <a:xfrm>
+          <a:off x="0" y="0"/>
+          <a:ext cx="0" cy="0"/>
+          <a:chOff x="0" y="0"/>
+          <a:chExt cx="0" cy="0"/>
+        </a:xfrm>
+      </p:grpSpPr>
       <p:sp>
         <p:nvSpPr>
           <p:cNvPr id="2" name="Title 1"/>
@@ -4343,7 +4419,7 @@
 </file>
 
 <file path=ppt/slides/slide2.xml><?xml version="1.0" encoding="utf-8"?>
-<p:sld xmlns:a="http://schemas.openxmlformats.org/drawingml/2006/main" xmlns:p="http://schemas.openxmlformats.org/presentationml/2006/main" xmlns:r="http://schemas.openxmlformats.org/officeDocument/2006/relationships">
+<p:sld xmlns:a="http://schemas.openxmlformats.org/drawingml/2006/main" xmlns:r="http://schemas.openxmlformats.org/officeDocument/2006/relationships" xmlns:p="http://schemas.openxmlformats.org/presentationml/2006/main">
   <p:cSld>
     <p:spTree>
       <p:nvGrpSpPr>
@@ -4351,7 +4427,14 @@
         <p:cNvGrpSpPr/>
         <p:nvPr/>
       </p:nvGrpSpPr>
-      <p:grpSpPr/>
+      <p:grpSpPr>
+        <a:xfrm>
+          <a:off x="0" y="0"/>
+          <a:ext cx="0" cy="0"/>
+          <a:chOff x="0" y="0"/>
+          <a:chExt cx="0" cy="0"/>
+        </a:xfrm>
+      </p:grpSpPr>
       <p:sp>
         <p:nvSpPr>
           <p:cNvPr id="2" name="Title 1"/>
@@ -4438,7 +4521,7 @@
 </file>
 
 <file path=ppt/slides/slide3.xml><?xml version="1.0" encoding="utf-8"?>
-<p:sld xmlns:a="http://schemas.openxmlformats.org/drawingml/2006/main" xmlns:p="http://schemas.openxmlformats.org/presentationml/2006/main" xmlns:r="http://schemas.openxmlformats.org/officeDocument/2006/relationships">
+<p:sld xmlns:a="http://schemas.openxmlformats.org/drawingml/2006/main" xmlns:r="http://schemas.openxmlformats.org/officeDocument/2006/relationships" xmlns:p="http://schemas.openxmlformats.org/presentationml/2006/main">
   <p:cSld>
     <p:spTree>
       <p:nvGrpSpPr>
@@ -4446,7 +4529,14 @@
         <p:cNvGrpSpPr/>
         <p:nvPr/>
       </p:nvGrpSpPr>
-      <p:grpSpPr/>
+      <p:grpSpPr>
+        <a:xfrm>
+          <a:off x="0" y="0"/>
+          <a:ext cx="0" cy="0"/>
+          <a:chOff x="0" y="0"/>
+          <a:chExt cx="0" cy="0"/>
+        </a:xfrm>
+      </p:grpSpPr>
       <p:sp>
         <p:nvSpPr>
           <p:cNvPr id="2" name="Title 1"/>
@@ -4591,7 +4681,7 @@
 </file>
 
 <file path=ppt/slides/slide4.xml><?xml version="1.0" encoding="utf-8"?>
-<p:sld xmlns:a="http://schemas.openxmlformats.org/drawingml/2006/main" xmlns:p="http://schemas.openxmlformats.org/presentationml/2006/main" xmlns:r="http://schemas.openxmlformats.org/officeDocument/2006/relationships">
+<p:sld xmlns:a="http://schemas.openxmlformats.org/drawingml/2006/main" xmlns:r="http://schemas.openxmlformats.org/officeDocument/2006/relationships" xmlns:p="http://schemas.openxmlformats.org/presentationml/2006/main">
   <p:cSld>
     <p:spTree>
       <p:nvGrpSpPr>
@@ -4599,7 +4689,14 @@
         <p:cNvGrpSpPr/>
         <p:nvPr/>
       </p:nvGrpSpPr>
-      <p:grpSpPr/>
+      <p:grpSpPr>
+        <a:xfrm>
+          <a:off x="0" y="0"/>
+          <a:ext cx="0" cy="0"/>
+          <a:chOff x="0" y="0"/>
+          <a:chExt cx="0" cy="0"/>
+        </a:xfrm>
+      </p:grpSpPr>
       <p:sp>
         <p:nvSpPr>
           <p:cNvPr id="2" name="Title 1"/>
@@ -4686,7 +4783,7 @@
 </file>
 
 <file path=ppt/slides/slide5.xml><?xml version="1.0" encoding="utf-8"?>
-<p:sld xmlns:a="http://schemas.openxmlformats.org/drawingml/2006/main" xmlns:p="http://schemas.openxmlformats.org/presentationml/2006/main" xmlns:r="http://schemas.openxmlformats.org/officeDocument/2006/relationships">
+<p:sld xmlns:a="http://schemas.openxmlformats.org/drawingml/2006/main" xmlns:r="http://schemas.openxmlformats.org/officeDocument/2006/relationships" xmlns:p="http://schemas.openxmlformats.org/presentationml/2006/main">
   <p:cSld>
     <p:spTree>
       <p:nvGrpSpPr>
@@ -4694,7 +4791,14 @@
         <p:cNvGrpSpPr/>
         <p:nvPr/>
       </p:nvGrpSpPr>
-      <p:grpSpPr/>
+      <p:grpSpPr>
+        <a:xfrm>
+          <a:off x="0" y="0"/>
+          <a:ext cx="0" cy="0"/>
+          <a:chOff x="0" y="0"/>
+          <a:chExt cx="0" cy="0"/>
+        </a:xfrm>
+      </p:grpSpPr>
       <p:sp>
         <p:nvSpPr>
           <p:cNvPr id="2" name="Title 1"/>
@@ -4839,7 +4943,7 @@
 </file>
 
 <file path=ppt/slides/slide6.xml><?xml version="1.0" encoding="utf-8"?>
-<p:sld xmlns:a="http://schemas.openxmlformats.org/drawingml/2006/main" xmlns:p="http://schemas.openxmlformats.org/presentationml/2006/main" xmlns:r="http://schemas.openxmlformats.org/officeDocument/2006/relationships">
+<p:sld xmlns:a="http://schemas.openxmlformats.org/drawingml/2006/main" xmlns:r="http://schemas.openxmlformats.org/officeDocument/2006/relationships" xmlns:p="http://schemas.openxmlformats.org/presentationml/2006/main">
   <p:cSld>
     <p:spTree>
       <p:nvGrpSpPr>
@@ -4847,7 +4951,14 @@
         <p:cNvGrpSpPr/>
         <p:nvPr/>
       </p:nvGrpSpPr>
-      <p:grpSpPr/>
+      <p:grpSpPr>
+        <a:xfrm>
+          <a:off x="0" y="0"/>
+          <a:ext cx="0" cy="0"/>
+          <a:chOff x="0" y="0"/>
+          <a:chExt cx="0" cy="0"/>
+        </a:xfrm>
+      </p:grpSpPr>
       <p:sp>
         <p:nvSpPr>
           <p:cNvPr id="2" name="Title 1"/>
@@ -4934,7 +5045,7 @@
 </file>
 
 <file path=ppt/slides/slide7.xml><?xml version="1.0" encoding="utf-8"?>
-<p:sld xmlns:a="http://schemas.openxmlformats.org/drawingml/2006/main" xmlns:p="http://schemas.openxmlformats.org/presentationml/2006/main" xmlns:r="http://schemas.openxmlformats.org/officeDocument/2006/relationships">
+<p:sld xmlns:a="http://schemas.openxmlformats.org/drawingml/2006/main" xmlns:r="http://schemas.openxmlformats.org/officeDocument/2006/relationships" xmlns:p="http://schemas.openxmlformats.org/presentationml/2006/main">
   <p:cSld>
     <p:spTree>
       <p:nvGrpSpPr>
@@ -4942,7 +5053,14 @@
         <p:cNvGrpSpPr/>
         <p:nvPr/>
       </p:nvGrpSpPr>
-      <p:grpSpPr/>
+      <p:grpSpPr>
+        <a:xfrm>
+          <a:off x="0" y="0"/>
+          <a:ext cx="0" cy="0"/>
+          <a:chOff x="0" y="0"/>
+          <a:chExt cx="0" cy="0"/>
+        </a:xfrm>
+      </p:grpSpPr>
       <p:sp>
         <p:nvSpPr>
           <p:cNvPr id="2" name="Title 1"/>
@@ -5097,7 +5215,7 @@
 </file>
 
 <file path=ppt/slides/slide8.xml><?xml version="1.0" encoding="utf-8"?>
-<p:sld xmlns:a="http://schemas.openxmlformats.org/drawingml/2006/main" xmlns:p="http://schemas.openxmlformats.org/presentationml/2006/main" xmlns:r="http://schemas.openxmlformats.org/officeDocument/2006/relationships">
+<p:sld xmlns:a="http://schemas.openxmlformats.org/drawingml/2006/main" xmlns:r="http://schemas.openxmlformats.org/officeDocument/2006/relationships" xmlns:p="http://schemas.openxmlformats.org/presentationml/2006/main">
   <p:cSld>
     <p:spTree>
       <p:nvGrpSpPr>
@@ -5105,7 +5223,14 @@
         <p:cNvGrpSpPr/>
         <p:nvPr/>
       </p:nvGrpSpPr>
-      <p:grpSpPr/>
+      <p:grpSpPr>
+        <a:xfrm>
+          <a:off x="0" y="0"/>
+          <a:ext cx="0" cy="0"/>
+          <a:chOff x="0" y="0"/>
+          <a:chExt cx="0" cy="0"/>
+        </a:xfrm>
+      </p:grpSpPr>
       <p:sp>
         <p:nvSpPr>
           <p:cNvPr id="2" name="Title 1"/>
@@ -5200,7 +5325,7 @@
 </file>
 
 <file path=ppt/slides/slide9.xml><?xml version="1.0" encoding="utf-8"?>
-<p:sld xmlns:a="http://schemas.openxmlformats.org/drawingml/2006/main" xmlns:p="http://schemas.openxmlformats.org/presentationml/2006/main" xmlns:r="http://schemas.openxmlformats.org/officeDocument/2006/relationships">
+<p:sld xmlns:a="http://schemas.openxmlformats.org/drawingml/2006/main" xmlns:r="http://schemas.openxmlformats.org/officeDocument/2006/relationships" xmlns:p="http://schemas.openxmlformats.org/presentationml/2006/main">
   <p:cSld>
     <p:spTree>
       <p:nvGrpSpPr>
@@ -5208,7 +5333,14 @@
         <p:cNvGrpSpPr/>
         <p:nvPr/>
       </p:nvGrpSpPr>
-      <p:grpSpPr/>
+      <p:grpSpPr>
+        <a:xfrm>
+          <a:off x="0" y="0"/>
+          <a:ext cx="0" cy="0"/>
+          <a:chOff x="0" y="0"/>
+          <a:chExt cx="0" cy="0"/>
+        </a:xfrm>
+      </p:grpSpPr>
       <p:sp>
         <p:nvSpPr>
           <p:cNvPr id="2" name="Title 1"/>
